--- a/Presentation Slides.pptx
+++ b/Presentation Slides.pptx
@@ -114,6 +114,11 @@
       </a:defRPr>
     </a:lvl9pPr>
   </p:defaultTextStyle>
+  <p:extLst>
+    <p:ext uri="{EFAFB233-063F-42B5-8137-9DF3F51BA10A}">
+      <p15:sldGuideLst xmlns:p15="http://schemas.microsoft.com/office/powerpoint/2012/main"/>
+    </p:ext>
+  </p:extLst>
 </p:presentation>
 </file>
 
@@ -3557,7 +3562,7 @@
         </p:nvSpPr>
         <p:spPr>
           <a:xfrm>
-            <a:off x="838200" y="1825625"/>
+            <a:off x="838200" y="1589651"/>
             <a:ext cx="10515600" cy="3237263"/>
           </a:xfrm>
         </p:spPr>
@@ -3732,7 +3737,7 @@
         </p:nvSpPr>
         <p:spPr>
           <a:xfrm>
-            <a:off x="838200" y="2098307"/>
+            <a:off x="720213" y="1488707"/>
             <a:ext cx="10515600" cy="4078656"/>
           </a:xfrm>
         </p:spPr>
@@ -3740,9 +3745,6 @@
           <a:bodyPr/>
           <a:lstStyle/>
           <a:p>
-            <a:pPr>
-              <a:buNone/>
-            </a:pPr>
             <a:r>
               <a:rPr lang="en-US" dirty="0">
                 <a:solidFill>
@@ -3756,9 +3758,6 @@
             </a:r>
           </a:p>
           <a:p>
-            <a:pPr>
-              <a:buNone/>
-            </a:pPr>
             <a:endParaRPr lang="en-US" dirty="0">
               <a:solidFill>
                 <a:schemeClr val="tx1">
@@ -3769,9 +3768,6 @@
             </a:endParaRPr>
           </a:p>
           <a:p>
-            <a:pPr>
-              <a:buNone/>
-            </a:pPr>
             <a:r>
               <a:rPr lang="en-US" dirty="0">
                 <a:solidFill>
@@ -3785,9 +3781,6 @@
             </a:r>
           </a:p>
           <a:p>
-            <a:pPr>
-              <a:buNone/>
-            </a:pPr>
             <a:endParaRPr lang="en-US" dirty="0">
               <a:solidFill>
                 <a:schemeClr val="tx1">
@@ -3798,9 +3791,6 @@
             </a:endParaRPr>
           </a:p>
           <a:p>
-            <a:pPr>
-              <a:buNone/>
-            </a:pPr>
             <a:r>
               <a:rPr lang="en-US" dirty="0">
                 <a:solidFill>
@@ -3910,9 +3900,7 @@
           <a:bodyPr/>
           <a:lstStyle/>
           <a:p>
-            <a:pPr algn="just">
-              <a:buNone/>
-            </a:pPr>
+            <a:pPr algn="just"/>
             <a:r>
               <a:rPr lang="en-US" dirty="0">
                 <a:solidFill>
@@ -3926,9 +3914,7 @@
             </a:r>
           </a:p>
           <a:p>
-            <a:pPr algn="just">
-              <a:buNone/>
-            </a:pPr>
+            <a:pPr algn="just"/>
             <a:endParaRPr lang="en-US" dirty="0">
               <a:solidFill>
                 <a:schemeClr val="tx1">
@@ -3939,9 +3925,7 @@
             </a:endParaRPr>
           </a:p>
           <a:p>
-            <a:pPr algn="just">
-              <a:buNone/>
-            </a:pPr>
+            <a:pPr algn="just"/>
             <a:r>
               <a:rPr lang="en-US" dirty="0">
                 <a:solidFill>
@@ -4047,9 +4031,7 @@
           <a:bodyPr/>
           <a:lstStyle/>
           <a:p>
-            <a:pPr algn="just">
-              <a:buNone/>
-            </a:pPr>
+            <a:pPr algn="just"/>
             <a:r>
               <a:rPr lang="en-US" dirty="0">
                 <a:solidFill>
@@ -4063,9 +4045,7 @@
             </a:r>
           </a:p>
           <a:p>
-            <a:pPr algn="just">
-              <a:buNone/>
-            </a:pPr>
+            <a:pPr algn="just"/>
             <a:endParaRPr lang="en-US" dirty="0">
               <a:solidFill>
                 <a:schemeClr val="tx1">
@@ -4076,9 +4056,7 @@
             </a:endParaRPr>
           </a:p>
           <a:p>
-            <a:pPr algn="just">
-              <a:buNone/>
-            </a:pPr>
+            <a:pPr algn="just"/>
             <a:r>
               <a:rPr lang="en-US" dirty="0">
                 <a:solidFill>
@@ -4186,9 +4164,6 @@
           </a:bodyPr>
           <a:lstStyle/>
           <a:p>
-            <a:pPr>
-              <a:buNone/>
-            </a:pPr>
             <a:r>
               <a:rPr lang="en-US" dirty="0">
                 <a:solidFill>
@@ -4202,9 +4177,6 @@
             </a:r>
           </a:p>
           <a:p>
-            <a:pPr>
-              <a:buNone/>
-            </a:pPr>
             <a:r>
               <a:rPr lang="en-US" dirty="0">
                 <a:solidFill>
@@ -4316,10 +4288,6 @@
             </a:r>
           </a:p>
           <a:p>
-            <a:pPr>
-              <a:buFont typeface="Arial" panose="020B0604020202020204" pitchFamily="34" charset="0"/>
-              <a:buChar char="•"/>
-            </a:pPr>
             <a:endParaRPr lang="en-US" dirty="0"/>
           </a:p>
           <a:p>
@@ -5314,7 +5282,7 @@
           </a:bodyPr>
           <a:lstStyle/>
           <a:p>
-            <a:pPr marL="0" lvl="0" indent="0" eaLnBrk="0" fontAlgn="base" hangingPunct="0">
+            <a:pPr lvl="0" eaLnBrk="0" fontAlgn="base" hangingPunct="0">
               <a:lnSpc>
                 <a:spcPct val="100000"/>
               </a:lnSpc>
@@ -5324,7 +5292,6 @@
               <a:spcAft>
                 <a:spcPct val="0"/>
               </a:spcAft>
-              <a:buNone/>
             </a:pPr>
             <a:r>
               <a:rPr lang="en-US" altLang="en-US" sz="8800" dirty="0">
@@ -5340,7 +5307,7 @@
             </a:r>
           </a:p>
           <a:p>
-            <a:pPr marL="0" lvl="0" indent="0" eaLnBrk="0" fontAlgn="base" hangingPunct="0">
+            <a:pPr lvl="0" eaLnBrk="0" fontAlgn="base" hangingPunct="0">
               <a:lnSpc>
                 <a:spcPct val="100000"/>
               </a:lnSpc>
@@ -5350,7 +5317,6 @@
               <a:spcAft>
                 <a:spcPct val="0"/>
               </a:spcAft>
-              <a:buNone/>
             </a:pPr>
             <a:endParaRPr lang="en-US" altLang="en-US" sz="8800" dirty="0">
               <a:solidFill>
@@ -5363,7 +5329,7 @@
             </a:endParaRPr>
           </a:p>
           <a:p>
-            <a:pPr marL="457200" lvl="1" indent="0" eaLnBrk="0" fontAlgn="base" hangingPunct="0">
+            <a:pPr lvl="1" eaLnBrk="0" fontAlgn="base" hangingPunct="0">
               <a:lnSpc>
                 <a:spcPct val="100000"/>
               </a:lnSpc>
@@ -5373,8 +5339,6 @@
               <a:spcAft>
                 <a:spcPct val="0"/>
               </a:spcAft>
-              <a:buFontTx/>
-              <a:buChar char="•"/>
             </a:pPr>
             <a:r>
               <a:rPr lang="en-US" altLang="en-US" sz="8800" b="1" dirty="0">
@@ -5406,7 +5370,7 @@
             </a:r>
           </a:p>
           <a:p>
-            <a:pPr marL="457200" lvl="1" indent="0" eaLnBrk="0" fontAlgn="base" hangingPunct="0">
+            <a:pPr lvl="1" eaLnBrk="0" fontAlgn="base" hangingPunct="0">
               <a:lnSpc>
                 <a:spcPct val="100000"/>
               </a:lnSpc>
@@ -5416,7 +5380,6 @@
               <a:spcAft>
                 <a:spcPct val="0"/>
               </a:spcAft>
-              <a:buNone/>
             </a:pPr>
             <a:endParaRPr lang="en-US" altLang="en-US" sz="8000" dirty="0">
               <a:solidFill>
@@ -5429,7 +5392,7 @@
             </a:endParaRPr>
           </a:p>
           <a:p>
-            <a:pPr marL="457200" lvl="1" indent="0" eaLnBrk="0" fontAlgn="base" hangingPunct="0">
+            <a:pPr lvl="1" eaLnBrk="0" fontAlgn="base" hangingPunct="0">
               <a:lnSpc>
                 <a:spcPct val="100000"/>
               </a:lnSpc>
@@ -5439,8 +5402,6 @@
               <a:spcAft>
                 <a:spcPct val="0"/>
               </a:spcAft>
-              <a:buFontTx/>
-              <a:buChar char="•"/>
             </a:pPr>
             <a:r>
               <a:rPr lang="en-US" altLang="en-US" sz="8000" b="1" dirty="0">
@@ -5460,7 +5421,7 @@
             </a:r>
           </a:p>
           <a:p>
-            <a:pPr marL="457200" lvl="1" indent="0" eaLnBrk="0" fontAlgn="base" hangingPunct="0">
+            <a:pPr lvl="1" eaLnBrk="0" fontAlgn="base" hangingPunct="0">
               <a:lnSpc>
                 <a:spcPct val="100000"/>
               </a:lnSpc>
@@ -5470,7 +5431,6 @@
               <a:spcAft>
                 <a:spcPct val="0"/>
               </a:spcAft>
-              <a:buNone/>
             </a:pPr>
             <a:endParaRPr lang="en-US" altLang="en-US" sz="8000" dirty="0">
               <a:solidFill>
@@ -5483,7 +5443,7 @@
             </a:endParaRPr>
           </a:p>
           <a:p>
-            <a:pPr marL="457200" lvl="1" indent="0" eaLnBrk="0" fontAlgn="base" hangingPunct="0">
+            <a:pPr lvl="1" eaLnBrk="0" fontAlgn="base" hangingPunct="0">
               <a:lnSpc>
                 <a:spcPct val="100000"/>
               </a:lnSpc>
@@ -5493,8 +5453,6 @@
               <a:spcAft>
                 <a:spcPct val="0"/>
               </a:spcAft>
-              <a:buFontTx/>
-              <a:buChar char="•"/>
             </a:pPr>
             <a:r>
               <a:rPr lang="en-US" altLang="en-US" sz="8000" b="1" dirty="0">
@@ -5523,7 +5481,7 @@
             </a:endParaRPr>
           </a:p>
           <a:p>
-            <a:pPr marL="457200" lvl="1" indent="0" eaLnBrk="0" fontAlgn="base" hangingPunct="0">
+            <a:pPr lvl="1" eaLnBrk="0" fontAlgn="base" hangingPunct="0">
               <a:lnSpc>
                 <a:spcPct val="100000"/>
               </a:lnSpc>
@@ -5533,8 +5491,6 @@
               <a:spcAft>
                 <a:spcPct val="0"/>
               </a:spcAft>
-              <a:buFontTx/>
-              <a:buChar char="•"/>
             </a:pPr>
             <a:endParaRPr lang="en-US" altLang="en-US" sz="8800" dirty="0">
               <a:solidFill>
@@ -5547,7 +5503,7 @@
             </a:endParaRPr>
           </a:p>
           <a:p>
-            <a:pPr marL="457200" lvl="1" indent="0" eaLnBrk="0" fontAlgn="base" hangingPunct="0">
+            <a:pPr lvl="1" eaLnBrk="0" fontAlgn="base" hangingPunct="0">
               <a:lnSpc>
                 <a:spcPct val="100000"/>
               </a:lnSpc>
@@ -5557,7 +5513,6 @@
               <a:spcAft>
                 <a:spcPct val="0"/>
               </a:spcAft>
-              <a:buNone/>
             </a:pPr>
             <a:endParaRPr lang="en-US" altLang="en-US" sz="8800" dirty="0">
               <a:solidFill>
@@ -5570,7 +5525,7 @@
             </a:endParaRPr>
           </a:p>
           <a:p>
-            <a:pPr marL="0" lvl="0" indent="0" eaLnBrk="0" fontAlgn="base" hangingPunct="0">
+            <a:pPr lvl="0" eaLnBrk="0" fontAlgn="base" hangingPunct="0">
               <a:lnSpc>
                 <a:spcPct val="100000"/>
               </a:lnSpc>
@@ -5580,7 +5535,6 @@
               <a:spcAft>
                 <a:spcPct val="0"/>
               </a:spcAft>
-              <a:buNone/>
             </a:pPr>
             <a:r>
               <a:rPr lang="en-US" altLang="en-US" sz="8800" dirty="0">
